--- a/ゲーム科1年/00_前期/ゲームプログラミングⅢ/ゲーム数学/実習/08_ベクトルの外積による左右判定.pptx
+++ b/ゲーム科1年/00_前期/ゲームプログラミングⅢ/ゲーム数学/実習/08_ベクトルの外積による左右判定.pptx
@@ -12,7 +12,8 @@
     <p:sldId id="260" r:id="rId6"/>
     <p:sldId id="261" r:id="rId7"/>
     <p:sldId id="262" r:id="rId8"/>
-    <p:sldId id="263" r:id="rId9"/>
+    <p:sldId id="264" r:id="rId9"/>
+    <p:sldId id="263" r:id="rId10"/>
   </p:sldIdLst>
   <p:sldSz cx="12192000" cy="6858000"/>
   <p:notesSz cx="6858000" cy="9144000"/>
@@ -266,7 +267,7 @@
           <a:p>
             <a:fld id="{E9CC885B-4903-4D54-9A93-00025F12DED9}" type="datetimeFigureOut">
               <a:rPr kumimoji="1" lang="ja-JP" altLang="en-US" smtClean="0"/>
-              <a:t>2024/12/4</a:t>
+              <a:t>2025/1/6</a:t>
             </a:fld>
             <a:endParaRPr kumimoji="1" lang="ja-JP" altLang="en-US"/>
           </a:p>
@@ -496,7 +497,7 @@
           <a:p>
             <a:fld id="{E9CC885B-4903-4D54-9A93-00025F12DED9}" type="datetimeFigureOut">
               <a:rPr kumimoji="1" lang="ja-JP" altLang="en-US" smtClean="0"/>
-              <a:t>2024/12/4</a:t>
+              <a:t>2025/1/6</a:t>
             </a:fld>
             <a:endParaRPr kumimoji="1" lang="ja-JP" altLang="en-US"/>
           </a:p>
@@ -736,7 +737,7 @@
           <a:p>
             <a:fld id="{E9CC885B-4903-4D54-9A93-00025F12DED9}" type="datetimeFigureOut">
               <a:rPr kumimoji="1" lang="ja-JP" altLang="en-US" smtClean="0"/>
-              <a:t>2024/12/4</a:t>
+              <a:t>2025/1/6</a:t>
             </a:fld>
             <a:endParaRPr kumimoji="1" lang="ja-JP" altLang="en-US"/>
           </a:p>
@@ -966,7 +967,7 @@
           <a:p>
             <a:fld id="{E9CC885B-4903-4D54-9A93-00025F12DED9}" type="datetimeFigureOut">
               <a:rPr kumimoji="1" lang="ja-JP" altLang="en-US" smtClean="0"/>
-              <a:t>2024/12/4</a:t>
+              <a:t>2025/1/6</a:t>
             </a:fld>
             <a:endParaRPr kumimoji="1" lang="ja-JP" altLang="en-US"/>
           </a:p>
@@ -1241,7 +1242,7 @@
           <a:p>
             <a:fld id="{E9CC885B-4903-4D54-9A93-00025F12DED9}" type="datetimeFigureOut">
               <a:rPr kumimoji="1" lang="ja-JP" altLang="en-US" smtClean="0"/>
-              <a:t>2024/12/4</a:t>
+              <a:t>2025/1/6</a:t>
             </a:fld>
             <a:endParaRPr kumimoji="1" lang="ja-JP" altLang="en-US"/>
           </a:p>
@@ -1570,7 +1571,7 @@
           <a:p>
             <a:fld id="{E9CC885B-4903-4D54-9A93-00025F12DED9}" type="datetimeFigureOut">
               <a:rPr kumimoji="1" lang="ja-JP" altLang="en-US" smtClean="0"/>
-              <a:t>2024/12/4</a:t>
+              <a:t>2025/1/6</a:t>
             </a:fld>
             <a:endParaRPr kumimoji="1" lang="ja-JP" altLang="en-US"/>
           </a:p>
@@ -2046,7 +2047,7 @@
           <a:p>
             <a:fld id="{E9CC885B-4903-4D54-9A93-00025F12DED9}" type="datetimeFigureOut">
               <a:rPr kumimoji="1" lang="ja-JP" altLang="en-US" smtClean="0"/>
-              <a:t>2024/12/4</a:t>
+              <a:t>2025/1/6</a:t>
             </a:fld>
             <a:endParaRPr kumimoji="1" lang="ja-JP" altLang="en-US"/>
           </a:p>
@@ -2187,7 +2188,7 @@
           <a:p>
             <a:fld id="{E9CC885B-4903-4D54-9A93-00025F12DED9}" type="datetimeFigureOut">
               <a:rPr kumimoji="1" lang="ja-JP" altLang="en-US" smtClean="0"/>
-              <a:t>2024/12/4</a:t>
+              <a:t>2025/1/6</a:t>
             </a:fld>
             <a:endParaRPr kumimoji="1" lang="ja-JP" altLang="en-US"/>
           </a:p>
@@ -2300,7 +2301,7 @@
           <a:p>
             <a:fld id="{E9CC885B-4903-4D54-9A93-00025F12DED9}" type="datetimeFigureOut">
               <a:rPr kumimoji="1" lang="ja-JP" altLang="en-US" smtClean="0"/>
-              <a:t>2024/12/4</a:t>
+              <a:t>2025/1/6</a:t>
             </a:fld>
             <a:endParaRPr kumimoji="1" lang="ja-JP" altLang="en-US"/>
           </a:p>
@@ -2643,7 +2644,7 @@
           <a:p>
             <a:fld id="{E9CC885B-4903-4D54-9A93-00025F12DED9}" type="datetimeFigureOut">
               <a:rPr kumimoji="1" lang="ja-JP" altLang="en-US" smtClean="0"/>
-              <a:t>2024/12/4</a:t>
+              <a:t>2025/1/6</a:t>
             </a:fld>
             <a:endParaRPr kumimoji="1" lang="ja-JP" altLang="en-US"/>
           </a:p>
@@ -2931,7 +2932,7 @@
           <a:p>
             <a:fld id="{E9CC885B-4903-4D54-9A93-00025F12DED9}" type="datetimeFigureOut">
               <a:rPr kumimoji="1" lang="ja-JP" altLang="en-US" smtClean="0"/>
-              <a:t>2024/12/4</a:t>
+              <a:t>2025/1/6</a:t>
             </a:fld>
             <a:endParaRPr kumimoji="1" lang="ja-JP" altLang="en-US"/>
           </a:p>
@@ -3204,7 +3205,7 @@
           <a:p>
             <a:fld id="{E9CC885B-4903-4D54-9A93-00025F12DED9}" type="datetimeFigureOut">
               <a:rPr kumimoji="1" lang="ja-JP" altLang="en-US" smtClean="0"/>
-              <a:t>2024/12/4</a:t>
+              <a:t>2025/1/6</a:t>
             </a:fld>
             <a:endParaRPr kumimoji="1" lang="ja-JP" altLang="en-US"/>
           </a:p>
@@ -4442,7 +4443,19 @@
             </a:r>
             <a:r>
               <a:rPr kumimoji="1" lang="ja-JP" altLang="en-US" sz="2400" dirty="0"/>
-              <a:t>を正規化した状態で用意します。</a:t>
+              <a:t>を</a:t>
+            </a:r>
+            <a:r>
+              <a:rPr kumimoji="1" lang="ja-JP" altLang="en-US" sz="2400" b="1" dirty="0">
+                <a:solidFill>
+                  <a:srgbClr val="FF0000"/>
+                </a:solidFill>
+              </a:rPr>
+              <a:t>正規化</a:t>
+            </a:r>
+            <a:r>
+              <a:rPr kumimoji="1" lang="ja-JP" altLang="en-US" sz="2400" dirty="0"/>
+              <a:t>した状態で用意します。</a:t>
             </a:r>
             <a:endParaRPr kumimoji="1" lang="en-US" altLang="ja-JP" sz="2400" dirty="0"/>
           </a:p>
@@ -5297,6 +5310,58 @@
       </p:grpSpPr>
       <p:sp>
         <p:nvSpPr>
+          <p:cNvPr id="2" name="四角形: 角を丸くする 1">
+            <a:extLst>
+              <a:ext uri="{FF2B5EF4-FFF2-40B4-BE49-F238E27FC236}">
+                <a16:creationId xmlns:a16="http://schemas.microsoft.com/office/drawing/2014/main" id="{97A69407-54D6-4CF5-8302-DBF494960E13}"/>
+              </a:ext>
+            </a:extLst>
+          </p:cNvPr>
+          <p:cNvSpPr/>
+          <p:nvPr/>
+        </p:nvSpPr>
+        <p:spPr>
+          <a:xfrm>
+            <a:off x="6999515" y="4896625"/>
+            <a:ext cx="5014680" cy="1605712"/>
+          </a:xfrm>
+          <a:prstGeom prst="roundRect">
+            <a:avLst/>
+          </a:prstGeom>
+          <a:solidFill>
+            <a:schemeClr val="bg2"/>
+          </a:solidFill>
+          <a:ln>
+            <a:noFill/>
+          </a:ln>
+        </p:spPr>
+        <p:style>
+          <a:lnRef idx="2">
+            <a:schemeClr val="accent1">
+              <a:shade val="50000"/>
+            </a:schemeClr>
+          </a:lnRef>
+          <a:fillRef idx="1">
+            <a:schemeClr val="accent1"/>
+          </a:fillRef>
+          <a:effectRef idx="0">
+            <a:schemeClr val="accent1"/>
+          </a:effectRef>
+          <a:fontRef idx="minor">
+            <a:schemeClr val="lt1"/>
+          </a:fontRef>
+        </p:style>
+        <p:txBody>
+          <a:bodyPr rtlCol="0" anchor="ctr"/>
+          <a:lstStyle/>
+          <a:p>
+            <a:pPr algn="ctr"/>
+            <a:endParaRPr kumimoji="1" lang="ja-JP" altLang="en-US"/>
+          </a:p>
+        </p:txBody>
+      </p:sp>
+      <p:sp>
+        <p:nvSpPr>
           <p:cNvPr id="4" name="テキスト ボックス 3">
             <a:extLst>
               <a:ext uri="{FF2B5EF4-FFF2-40B4-BE49-F238E27FC236}">
@@ -5870,6 +5935,58 @@
       </p:grpSpPr>
       <p:sp>
         <p:nvSpPr>
+          <p:cNvPr id="24" name="四角形: 角を丸くする 23">
+            <a:extLst>
+              <a:ext uri="{FF2B5EF4-FFF2-40B4-BE49-F238E27FC236}">
+                <a16:creationId xmlns:a16="http://schemas.microsoft.com/office/drawing/2014/main" id="{70DA1D8A-398E-48E7-92D4-82DD34A8BF60}"/>
+              </a:ext>
+            </a:extLst>
+          </p:cNvPr>
+          <p:cNvSpPr/>
+          <p:nvPr/>
+        </p:nvSpPr>
+        <p:spPr>
+          <a:xfrm>
+            <a:off x="6999515" y="4896625"/>
+            <a:ext cx="5014680" cy="1605712"/>
+          </a:xfrm>
+          <a:prstGeom prst="roundRect">
+            <a:avLst/>
+          </a:prstGeom>
+          <a:solidFill>
+            <a:schemeClr val="bg2"/>
+          </a:solidFill>
+          <a:ln>
+            <a:noFill/>
+          </a:ln>
+        </p:spPr>
+        <p:style>
+          <a:lnRef idx="2">
+            <a:schemeClr val="accent1">
+              <a:shade val="50000"/>
+            </a:schemeClr>
+          </a:lnRef>
+          <a:fillRef idx="1">
+            <a:schemeClr val="accent1"/>
+          </a:fillRef>
+          <a:effectRef idx="0">
+            <a:schemeClr val="accent1"/>
+          </a:effectRef>
+          <a:fontRef idx="minor">
+            <a:schemeClr val="lt1"/>
+          </a:fontRef>
+        </p:style>
+        <p:txBody>
+          <a:bodyPr rtlCol="0" anchor="ctr"/>
+          <a:lstStyle/>
+          <a:p>
+            <a:pPr algn="ctr"/>
+            <a:endParaRPr kumimoji="1" lang="ja-JP" altLang="en-US"/>
+          </a:p>
+        </p:txBody>
+      </p:sp>
+      <p:sp>
+        <p:nvSpPr>
           <p:cNvPr id="4" name="テキスト ボックス 3">
             <a:extLst>
               <a:ext uri="{FF2B5EF4-FFF2-40B4-BE49-F238E27FC236}">
@@ -6564,6 +6681,162 @@
 </file>
 
 <file path=ppt/slides/slide8.xml><?xml version="1.0" encoding="utf-8"?>
+<p:sld xmlns:a="http://schemas.openxmlformats.org/drawingml/2006/main" xmlns:r="http://schemas.openxmlformats.org/officeDocument/2006/relationships" xmlns:p="http://schemas.openxmlformats.org/presentationml/2006/main">
+  <p:cSld>
+    <p:spTree>
+      <p:nvGrpSpPr>
+        <p:cNvPr id="1" name=""/>
+        <p:cNvGrpSpPr/>
+        <p:nvPr/>
+      </p:nvGrpSpPr>
+      <p:grpSpPr>
+        <a:xfrm>
+          <a:off x="0" y="0"/>
+          <a:ext cx="0" cy="0"/>
+          <a:chOff x="0" y="0"/>
+          <a:chExt cx="0" cy="0"/>
+        </a:xfrm>
+      </p:grpSpPr>
+      <p:sp>
+        <p:nvSpPr>
+          <p:cNvPr id="4" name="テキスト ボックス 3">
+            <a:extLst>
+              <a:ext uri="{FF2B5EF4-FFF2-40B4-BE49-F238E27FC236}">
+                <a16:creationId xmlns:a16="http://schemas.microsoft.com/office/drawing/2014/main" id="{5A13BF46-B8C5-48AA-8308-C9ECFF431A18}"/>
+              </a:ext>
+            </a:extLst>
+          </p:cNvPr>
+          <p:cNvSpPr txBox="1"/>
+          <p:nvPr/>
+        </p:nvSpPr>
+        <p:spPr>
+          <a:xfrm>
+            <a:off x="567542" y="491954"/>
+            <a:ext cx="5929828" cy="584775"/>
+          </a:xfrm>
+          <a:prstGeom prst="rect">
+            <a:avLst/>
+          </a:prstGeom>
+          <a:noFill/>
+        </p:spPr>
+        <p:txBody>
+          <a:bodyPr wrap="none" rtlCol="0">
+            <a:spAutoFit/>
+          </a:bodyPr>
+          <a:lstStyle/>
+          <a:p>
+            <a:r>
+              <a:rPr kumimoji="1" lang="ja-JP" altLang="en-US" sz="3200" b="1" u="sng" dirty="0"/>
+              <a:t>ベクトルの外積による左右判定</a:t>
+            </a:r>
+          </a:p>
+        </p:txBody>
+      </p:sp>
+      <p:sp>
+        <p:nvSpPr>
+          <p:cNvPr id="6" name="テキスト ボックス 5">
+            <a:extLst>
+              <a:ext uri="{FF2B5EF4-FFF2-40B4-BE49-F238E27FC236}">
+                <a16:creationId xmlns:a16="http://schemas.microsoft.com/office/drawing/2014/main" id="{55830AD6-028B-4C4E-80BF-B70DFC1C3A46}"/>
+              </a:ext>
+            </a:extLst>
+          </p:cNvPr>
+          <p:cNvSpPr txBox="1"/>
+          <p:nvPr/>
+        </p:nvSpPr>
+        <p:spPr>
+          <a:xfrm>
+            <a:off x="567542" y="1216429"/>
+            <a:ext cx="11264622" cy="2308324"/>
+          </a:xfrm>
+          <a:prstGeom prst="rect">
+            <a:avLst/>
+          </a:prstGeom>
+          <a:noFill/>
+        </p:spPr>
+        <p:txBody>
+          <a:bodyPr wrap="none" rtlCol="0">
+            <a:spAutoFit/>
+          </a:bodyPr>
+          <a:lstStyle/>
+          <a:p>
+            <a:r>
+              <a:rPr lang="ja-JP" altLang="en-US" sz="2400" dirty="0"/>
+              <a:t>②の敵の向きは、</a:t>
+            </a:r>
+            <a:endParaRPr lang="en-US" altLang="ja-JP" sz="2400" dirty="0"/>
+          </a:p>
+          <a:p>
+            <a:r>
+              <a:rPr kumimoji="1" lang="en-US" altLang="ja-JP" sz="2400" b="1" dirty="0" err="1">
+                <a:solidFill>
+                  <a:srgbClr val="0070C0"/>
+                </a:solidFill>
+              </a:rPr>
+              <a:t>g_SightMachineData.angle</a:t>
+            </a:r>
+            <a:r>
+              <a:rPr kumimoji="1" lang="ja-JP" altLang="en-US" sz="2400" b="1" dirty="0">
+                <a:solidFill>
+                  <a:srgbClr val="0070C0"/>
+                </a:solidFill>
+              </a:rPr>
+              <a:t>変数</a:t>
+            </a:r>
+            <a:r>
+              <a:rPr kumimoji="1" lang="ja-JP" altLang="en-US" sz="2400" dirty="0"/>
+              <a:t>に回転角度が格納されています。</a:t>
+            </a:r>
+            <a:endParaRPr kumimoji="1" lang="en-US" altLang="ja-JP" sz="2400" dirty="0"/>
+          </a:p>
+          <a:p>
+            <a:r>
+              <a:rPr lang="ja-JP" altLang="en-US" sz="2400" dirty="0"/>
+              <a:t>角度から向きベクトルを求めるには、</a:t>
+            </a:r>
+            <a:endParaRPr lang="en-US" altLang="ja-JP" sz="2400" dirty="0"/>
+          </a:p>
+          <a:p>
+            <a:r>
+              <a:rPr kumimoji="1" lang="ja-JP" altLang="en-US" sz="2400" b="1" dirty="0">
+                <a:solidFill>
+                  <a:srgbClr val="FF0000"/>
+                </a:solidFill>
+              </a:rPr>
+              <a:t>極座標ベクトルからデカルト座標ベクトルに変換</a:t>
+            </a:r>
+            <a:r>
+              <a:rPr kumimoji="1" lang="ja-JP" altLang="en-US" sz="2400" dirty="0"/>
+              <a:t>する計算を思い出しましょう。</a:t>
+            </a:r>
+            <a:endParaRPr kumimoji="1" lang="en-US" altLang="ja-JP" sz="2400" dirty="0"/>
+          </a:p>
+          <a:p>
+            <a:endParaRPr lang="en-US" altLang="ja-JP" sz="2400" dirty="0"/>
+          </a:p>
+          <a:p>
+            <a:r>
+              <a:rPr kumimoji="1" lang="ja-JP" altLang="en-US" sz="2400" dirty="0"/>
+              <a:t>うまくやれば③の正規化を省略することができます。</a:t>
+            </a:r>
+            <a:endParaRPr kumimoji="1" lang="en-US" altLang="ja-JP" sz="2400" dirty="0"/>
+          </a:p>
+        </p:txBody>
+      </p:sp>
+    </p:spTree>
+    <p:extLst>
+      <p:ext uri="{BB962C8B-B14F-4D97-AF65-F5344CB8AC3E}">
+        <p14:creationId xmlns:p14="http://schemas.microsoft.com/office/powerpoint/2010/main" val="913192796"/>
+      </p:ext>
+    </p:extLst>
+  </p:cSld>
+  <p:clrMapOvr>
+    <a:masterClrMapping/>
+  </p:clrMapOvr>
+</p:sld>
+</file>
+
+<file path=ppt/slides/slide9.xml><?xml version="1.0" encoding="utf-8"?>
 <p:sld xmlns:a="http://schemas.openxmlformats.org/drawingml/2006/main" xmlns:r="http://schemas.openxmlformats.org/officeDocument/2006/relationships" xmlns:p="http://schemas.openxmlformats.org/presentationml/2006/main">
   <p:cSld>
     <p:spTree>
